--- a/1차 프로젝트/2. 개발 스케쥴.pptx
+++ b/1차 프로젝트/2. 개발 스케쥴.pptx
@@ -411,7 +411,7 @@
           <a:p>
             <a:fld id="{5FF1FBC4-7606-4365-936D-FA197F527325}" type="datetimeFigureOut">
               <a:rPr lang="ko-KR" altLang="en-US" smtClean="0"/>
-              <a:t>2026-03-16</a:t>
+              <a:t>2026-03-19</a:t>
             </a:fld>
             <a:endParaRPr lang="ko-KR" altLang="en-US"/>
           </a:p>
@@ -609,7 +609,7 @@
           <a:p>
             <a:fld id="{5FF1FBC4-7606-4365-936D-FA197F527325}" type="datetimeFigureOut">
               <a:rPr lang="ko-KR" altLang="en-US" smtClean="0"/>
-              <a:t>2026-03-16</a:t>
+              <a:t>2026-03-19</a:t>
             </a:fld>
             <a:endParaRPr lang="ko-KR" altLang="en-US"/>
           </a:p>
@@ -817,7 +817,7 @@
           <a:p>
             <a:fld id="{5FF1FBC4-7606-4365-936D-FA197F527325}" type="datetimeFigureOut">
               <a:rPr lang="ko-KR" altLang="en-US" smtClean="0"/>
-              <a:t>2026-03-16</a:t>
+              <a:t>2026-03-19</a:t>
             </a:fld>
             <a:endParaRPr lang="ko-KR" altLang="en-US"/>
           </a:p>
@@ -1248,7 +1248,7 @@
           <a:p>
             <a:fld id="{5FF1FBC4-7606-4365-936D-FA197F527325}" type="datetimeFigureOut">
               <a:rPr lang="ko-KR" altLang="en-US" smtClean="0"/>
-              <a:t>2026-03-16</a:t>
+              <a:t>2026-03-19</a:t>
             </a:fld>
             <a:endParaRPr lang="ko-KR" altLang="en-US"/>
           </a:p>
@@ -1513,7 +1513,7 @@
           <a:p>
             <a:fld id="{5FF1FBC4-7606-4365-936D-FA197F527325}" type="datetimeFigureOut">
               <a:rPr lang="ko-KR" altLang="en-US" smtClean="0"/>
-              <a:t>2026-03-16</a:t>
+              <a:t>2026-03-19</a:t>
             </a:fld>
             <a:endParaRPr lang="ko-KR" altLang="en-US"/>
           </a:p>
@@ -1925,7 +1925,7 @@
           <a:p>
             <a:fld id="{5FF1FBC4-7606-4365-936D-FA197F527325}" type="datetimeFigureOut">
               <a:rPr lang="ko-KR" altLang="en-US" smtClean="0"/>
-              <a:t>2026-03-16</a:t>
+              <a:t>2026-03-19</a:t>
             </a:fld>
             <a:endParaRPr lang="ko-KR" altLang="en-US"/>
           </a:p>
@@ -2066,7 +2066,7 @@
           <a:p>
             <a:fld id="{5FF1FBC4-7606-4365-936D-FA197F527325}" type="datetimeFigureOut">
               <a:rPr lang="ko-KR" altLang="en-US" smtClean="0"/>
-              <a:t>2026-03-16</a:t>
+              <a:t>2026-03-19</a:t>
             </a:fld>
             <a:endParaRPr lang="ko-KR" altLang="en-US"/>
           </a:p>
@@ -2179,7 +2179,7 @@
           <a:p>
             <a:fld id="{5FF1FBC4-7606-4365-936D-FA197F527325}" type="datetimeFigureOut">
               <a:rPr lang="ko-KR" altLang="en-US" smtClean="0"/>
-              <a:t>2026-03-16</a:t>
+              <a:t>2026-03-19</a:t>
             </a:fld>
             <a:endParaRPr lang="ko-KR" altLang="en-US"/>
           </a:p>
@@ -2490,7 +2490,7 @@
           <a:p>
             <a:fld id="{5FF1FBC4-7606-4365-936D-FA197F527325}" type="datetimeFigureOut">
               <a:rPr lang="ko-KR" altLang="en-US" smtClean="0"/>
-              <a:t>2026-03-16</a:t>
+              <a:t>2026-03-19</a:t>
             </a:fld>
             <a:endParaRPr lang="ko-KR" altLang="en-US"/>
           </a:p>
@@ -2731,7 +2731,7 @@
           <a:p>
             <a:fld id="{5FF1FBC4-7606-4365-936D-FA197F527325}" type="datetimeFigureOut">
               <a:rPr lang="ko-KR" altLang="en-US" smtClean="0"/>
-              <a:t>2026-03-16</a:t>
+              <a:t>2026-03-19</a:t>
             </a:fld>
             <a:endParaRPr lang="ko-KR" altLang="en-US"/>
           </a:p>
@@ -3230,10 +3230,10 @@
       </p:sp>
       <p:pic>
         <p:nvPicPr>
-          <p:cNvPr id="5" name="그림 4">
-            <a:extLst>
-              <a:ext uri="{FF2B5EF4-FFF2-40B4-BE49-F238E27FC236}">
-                <a16:creationId xmlns:a16="http://schemas.microsoft.com/office/drawing/2014/main" id="{D7B843F1-3E59-066C-8BAD-83D7F303AEDF}"/>
+          <p:cNvPr id="4" name="그림 3">
+            <a:extLst>
+              <a:ext uri="{FF2B5EF4-FFF2-40B4-BE49-F238E27FC236}">
+                <a16:creationId xmlns:a16="http://schemas.microsoft.com/office/drawing/2014/main" id="{0BFB50DD-D524-FEDD-4495-209DF66148FA}"/>
               </a:ext>
             </a:extLst>
           </p:cNvPr>
@@ -3250,17 +3250,12 @@
         </p:blipFill>
         <p:spPr>
           <a:xfrm>
-            <a:off x="188558" y="1157551"/>
-            <a:ext cx="11814885" cy="4992878"/>
+            <a:off x="168302" y="1102352"/>
+            <a:ext cx="11855395" cy="5066048"/>
           </a:xfrm>
           <a:prstGeom prst="rect">
             <a:avLst/>
           </a:prstGeom>
-          <a:ln>
-            <a:solidFill>
-              <a:schemeClr val="tx1"/>
-            </a:solidFill>
-          </a:ln>
         </p:spPr>
       </p:pic>
     </p:spTree>
